--- a/01-Kubernetes/session9/01-09-GitOps-ArgoCD.pptx
+++ b/01-Kubernetes/session9/01-09-GitOps-ArgoCD.pptx
@@ -3529,7 +3529,29 @@
                 <a:ea typeface="Arial" pitchFamily="34" charset="-122"/>
                 <a:cs typeface="Arial" pitchFamily="34" charset="-120"/>
               </a:rPr>
-              <a:t>Declarative continuous delivery for Kubernetes</a:t>
+              <a:t>Declarative </a:t>
+            </a:r>
+            <a:r>
+              <a:rPr lang="en-US" sz="1400" i="1">
+                <a:solidFill>
+                  <a:srgbClr val="7A8BBE"/>
+                </a:solidFill>
+                <a:latin typeface="Arial" pitchFamily="34" charset="0"/>
+                <a:ea typeface="Arial" pitchFamily="34" charset="-122"/>
+                <a:cs typeface="Arial" pitchFamily="34" charset="-120"/>
+              </a:rPr>
+              <a:t>continuous deployment </a:t>
+            </a:r>
+            <a:r>
+              <a:rPr lang="en-US" sz="1400" i="1" dirty="0">
+                <a:solidFill>
+                  <a:srgbClr val="7A8BBE"/>
+                </a:solidFill>
+                <a:latin typeface="Arial" pitchFamily="34" charset="0"/>
+                <a:ea typeface="Arial" pitchFamily="34" charset="-122"/>
+                <a:cs typeface="Arial" pitchFamily="34" charset="-120"/>
+              </a:rPr>
+              <a:t>for Kubernetes</a:t>
             </a:r>
             <a:endParaRPr lang="en-US" sz="1400" dirty="0"/>
           </a:p>
